--- a/curso_es/pptx/S84.pptx
+++ b/curso_es/pptx/S84.pptx
@@ -3800,7 +3800,7 @@
                 </a:solidFill>
                 <a:latin typeface="Nunito Sans"/>
               </a:rPr>
-              <a:t>Maialen viaja con su familia a otro país. Allí cenan a las seis de la tarde. Su padre comenta: «Qué gente más rara, cenar a esas horas no es normal».</a:t>
+              <a:t>Una chica viaja con su familia a otro país. Allí cenan a las seis de la tarde. Su padre comenta: «Qué gente más rara, cenar a esas horas no es normal».</a:t>
             </a:r>
           </a:p>
         </p:txBody>
@@ -4109,7 +4109,7 @@
                 </a:solidFill>
                 <a:latin typeface="Nunito Sans"/>
               </a:rPr>
-              <a:t>Vuelve el caso del principio: en casa de Chen se quitan los zapatos al entrar; en casa de Iker, no. ¿Cuál lo hace bien?</a:t>
+              <a:t>Vuelve el caso del principio: en casa de un chico se quitan los zapatos al entrar; en casa de otro, no. ¿Cuál lo hace bien?</a:t>
             </a:r>
           </a:p>
         </p:txBody>
@@ -6694,7 +6694,7 @@
                 </a:solidFill>
                 <a:latin typeface="Nunito Sans"/>
               </a:rPr>
-              <a:t>En casa de Chen todos se quitan los zapatos al entrar. En casa de Iker, nadie. La primera vez, Iker se quedó parado en la puerta de Chen.</a:t>
+              <a:t>En casa de un chico todos se quitan los zapatos al entrar. En casa de otro, nadie. La primera vez, el segundo se quedó parado en la puerta del primero.</a:t>
             </a:r>
           </a:p>
         </p:txBody>
